--- a/MindBridge_Presentation.pptx
+++ b/MindBridge_Presentation.pptx
@@ -3527,10 +3527,8 @@
                 </a:solidFill>
                 <a:latin typeface="Arial"/>
               </a:rPr>
-              <a:t>Member 1 — Backend &amp; Testing
-Member 2 — Frontend &amp; UX
-Member 3 — DevOps &amp; Infrastructure
-Member 4 — Documentation &amp; Scrum</a:t>
+              <a:t>EBODE ADA ERIKA ALEXANDRA  (ICTU20233909)  —  Team Leader
+AJA CHELLA ASAMBA JR  (ICTU20233787)  —  Developer &amp; DevOps</a:t>
             </a:r>
           </a:p>
         </p:txBody>
